--- a/dataset/guides_final/ACS/manual/IT-ACS-003-M_퇴사·부서이동 권한 변경 처리 매뉴얼.pptx
+++ b/dataset/guides_final/ACS/manual/IT-ACS-003-M_퇴사·부서이동 권한 변경 처리 매뉴얼.pptx
@@ -26597,7 +26597,7 @@
                 <a:ea typeface="Malgun Gothic"/>
                 <a:cs typeface="Malgun Gothic"/>
               </a:rPr>
-              <a:t>티켓: 담당자 조치가 필요한 건. 담당 팀에 배정하고 상태를 RDY → IP → FIN → CLS 로 관리한다. FIN은 담당자 처리 완료, CLS는 문의자가 해결을 확인한 최종</a:t>
+              <a:t>티켓: 담당자 조치가 필요한 건. 담당 팀에 배정하고 상태를 RDY → WIP → FIN → CLS 로 관리한다. FIN은 담당자 처리 완료, CLS는 문의자가 해결을 확인한 최종</a:t>
             </a:r>
           </a:p>
           <a:p>

--- a/dataset/guides_final/ACS/manual/IT-ACS-003-M_퇴사·부서이동 권한 변경 처리 매뉴얼.pptx
+++ b/dataset/guides_final/ACS/manual/IT-ACS-003-M_퇴사·부서이동 권한 변경 처리 매뉴얼.pptx
@@ -3234,7 +3234,7 @@
                 <a:ea typeface="Malgun Gothic"/>
                 <a:cs typeface="Malgun Gothic"/>
               </a:rPr>
-              <a:t>한화시스템 ICT IT 담당자 매뉴얼 · 접근권한</a:t>
+              <a:t>가상 ICT 기업 IT 담당자 매뉴얼 · 접근권한</a:t>
             </a:r>
           </a:p>
         </p:txBody>
@@ -3513,7 +3513,7 @@
                 <a:ea typeface="Malgun Gothic"/>
                 <a:cs typeface="Malgun Gothic"/>
               </a:rPr>
-              <a:t>© HANWHA SYSTEMS ICT · IT-ACS-003-M · 사내 제한</a:t>
+              <a:t>© 가상 ICT 기업 · IT-ACS-003-M · 사내 제한</a:t>
             </a:r>
           </a:p>
         </p:txBody>
@@ -4438,7 +4438,7 @@
                 <a:ea typeface="Malgun Gothic"/>
                 <a:cs typeface="Malgun Gothic"/>
               </a:rPr>
-              <a:t>© HANWHA SYSTEMS ICT · IT-ACS-003-M · 사내 제한</a:t>
+              <a:t>© 가상 ICT 기업 · IT-ACS-003-M · 사내 제한</a:t>
             </a:r>
           </a:p>
         </p:txBody>
@@ -7542,7 +7542,7 @@
                 <a:ea typeface="Malgun Gothic"/>
                 <a:cs typeface="Malgun Gothic"/>
               </a:rPr>
-              <a:t>© HANWHA SYSTEMS ICT · IT-ACS-003-M · 사내 제한</a:t>
+              <a:t>© 가상 ICT 기업 · IT-ACS-003-M · 사내 제한</a:t>
             </a:r>
           </a:p>
         </p:txBody>
@@ -10106,7 +10106,7 @@
                 <a:ea typeface="Malgun Gothic"/>
                 <a:cs typeface="Malgun Gothic"/>
               </a:rPr>
-              <a:t>© HANWHA SYSTEMS ICT · IT-ACS-003-M · 사내 제한</a:t>
+              <a:t>© 가상 ICT 기업 · IT-ACS-003-M · 사내 제한</a:t>
             </a:r>
           </a:p>
         </p:txBody>
@@ -11844,7 +11844,7 @@
                 <a:ea typeface="Malgun Gothic"/>
                 <a:cs typeface="Malgun Gothic"/>
               </a:rPr>
-              <a:t>© HANWHA SYSTEMS ICT · IT-ACS-003-M · 사내 제한</a:t>
+              <a:t>© 가상 ICT 기업 · IT-ACS-003-M · 사내 제한</a:t>
             </a:r>
           </a:p>
         </p:txBody>
@@ -15018,7 +15018,7 @@
                 <a:ea typeface="Malgun Gothic"/>
                 <a:cs typeface="Malgun Gothic"/>
               </a:rPr>
-              <a:t>© HANWHA SYSTEMS ICT · IT-ACS-003-M · 사내 제한</a:t>
+              <a:t>© 가상 ICT 기업 · IT-ACS-003-M · 사내 제한</a:t>
             </a:r>
           </a:p>
         </p:txBody>
@@ -15266,7 +15266,7 @@
                 <a:ea typeface="Malgun Gothic"/>
                 <a:cs typeface="Malgun Gothic"/>
               </a:rPr>
-              <a:t>© HANWHA SYSTEMS ICT · IT-ACS-003-M · 사내 제한</a:t>
+              <a:t>© 가상 ICT 기업 · IT-ACS-003-M · 사내 제한</a:t>
             </a:r>
           </a:p>
         </p:txBody>
@@ -15925,7 +15925,7 @@
                 <a:ea typeface="Malgun Gothic"/>
                 <a:cs typeface="Malgun Gothic"/>
               </a:rPr>
-              <a:t>© HANWHA SYSTEMS ICT · IT-ACS-003-M · 사내 제한</a:t>
+              <a:t>© 가상 ICT 기업 · IT-ACS-003-M · 사내 제한</a:t>
             </a:r>
           </a:p>
         </p:txBody>
@@ -16173,7 +16173,7 @@
                 <a:ea typeface="Malgun Gothic"/>
                 <a:cs typeface="Malgun Gothic"/>
               </a:rPr>
-              <a:t>© HANWHA SYSTEMS ICT · IT-ACS-003-M · 사내 제한</a:t>
+              <a:t>© 가상 ICT 기업 · IT-ACS-003-M · 사내 제한</a:t>
             </a:r>
           </a:p>
         </p:txBody>
@@ -17201,7 +17201,7 @@
                 <a:ea typeface="Malgun Gothic"/>
                 <a:cs typeface="Malgun Gothic"/>
               </a:rPr>
-              <a:t>© HANWHA SYSTEMS ICT · IT-ACS-003-M · 사내 제한</a:t>
+              <a:t>© 가상 ICT 기업 · IT-ACS-003-M · 사내 제한</a:t>
             </a:r>
           </a:p>
         </p:txBody>
@@ -17449,7 +17449,7 @@
                 <a:ea typeface="Malgun Gothic"/>
                 <a:cs typeface="Malgun Gothic"/>
               </a:rPr>
-              <a:t>© HANWHA SYSTEMS ICT · IT-ACS-003-M · 사내 제한</a:t>
+              <a:t>© 가상 ICT 기업 · IT-ACS-003-M · 사내 제한</a:t>
             </a:r>
           </a:p>
         </p:txBody>
@@ -19092,7 +19092,7 @@
                 <a:ea typeface="Malgun Gothic"/>
                 <a:cs typeface="Malgun Gothic"/>
               </a:rPr>
-              <a:t>© HANWHA SYSTEMS ICT · IT-ACS-003-M · 사내 제한</a:t>
+              <a:t>© 가상 ICT 기업 · IT-ACS-003-M · 사내 제한</a:t>
             </a:r>
           </a:p>
         </p:txBody>
@@ -20571,7 +20571,7 @@
                 <a:ea typeface="Malgun Gothic"/>
                 <a:cs typeface="Malgun Gothic"/>
               </a:rPr>
-              <a:t>© HANWHA SYSTEMS ICT · IT-ACS-003-M · 사내 제한</a:t>
+              <a:t>© 가상 ICT 기업 · IT-ACS-003-M · 사내 제한</a:t>
             </a:r>
           </a:p>
         </p:txBody>
@@ -21501,7 +21501,7 @@
                 <a:ea typeface="Malgun Gothic"/>
                 <a:cs typeface="Malgun Gothic"/>
               </a:rPr>
-              <a:t>© HANWHA SYSTEMS ICT · IT-ACS-003-M · 사내 제한</a:t>
+              <a:t>© 가상 ICT 기업 · IT-ACS-003-M · 사내 제한</a:t>
             </a:r>
           </a:p>
         </p:txBody>
@@ -22647,7 +22647,7 @@
                 <a:ea typeface="Malgun Gothic"/>
                 <a:cs typeface="Malgun Gothic"/>
               </a:rPr>
-              <a:t>© HANWHA SYSTEMS ICT · IT-ACS-003-M · 사내 제한</a:t>
+              <a:t>© 가상 ICT 기업 · IT-ACS-003-M · 사내 제한</a:t>
             </a:r>
           </a:p>
         </p:txBody>
@@ -22895,7 +22895,7 @@
                 <a:ea typeface="Malgun Gothic"/>
                 <a:cs typeface="Malgun Gothic"/>
               </a:rPr>
-              <a:t>© HANWHA SYSTEMS ICT · IT-ACS-003-M · 사내 제한</a:t>
+              <a:t>© 가상 ICT 기업 · IT-ACS-003-M · 사내 제한</a:t>
             </a:r>
           </a:p>
         </p:txBody>
@@ -23817,7 +23817,7 @@
                 <a:ea typeface="Malgun Gothic"/>
                 <a:cs typeface="Malgun Gothic"/>
               </a:rPr>
-              <a:t>© HANWHA SYSTEMS ICT · IT-ACS-003-M · 사내 제한</a:t>
+              <a:t>© 가상 ICT 기업 · IT-ACS-003-M · 사내 제한</a:t>
             </a:r>
           </a:p>
         </p:txBody>
@@ -24065,7 +24065,7 @@
                 <a:ea typeface="Malgun Gothic"/>
                 <a:cs typeface="Malgun Gothic"/>
               </a:rPr>
-              <a:t>© HANWHA SYSTEMS ICT · IT-ACS-003-M · 사내 제한</a:t>
+              <a:t>© 가상 ICT 기업 · IT-ACS-003-M · 사내 제한</a:t>
             </a:r>
           </a:p>
         </p:txBody>
@@ -26903,7 +26903,7 @@
                 <a:ea typeface="Malgun Gothic"/>
                 <a:cs typeface="Malgun Gothic"/>
               </a:rPr>
-              <a:t>© HANWHA SYSTEMS ICT · IT-ACS-003-M · 사내 제한</a:t>
+              <a:t>© 가상 ICT 기업 · IT-ACS-003-M · 사내 제한</a:t>
             </a:r>
           </a:p>
         </p:txBody>
@@ -27151,7 +27151,7 @@
                 <a:ea typeface="Malgun Gothic"/>
                 <a:cs typeface="Malgun Gothic"/>
               </a:rPr>
-              <a:t>© HANWHA SYSTEMS ICT · IT-ACS-003-M · 사내 제한</a:t>
+              <a:t>© 가상 ICT 기업 · IT-ACS-003-M · 사내 제한</a:t>
             </a:r>
           </a:p>
         </p:txBody>
@@ -29849,7 +29849,7 @@
                 <a:ea typeface="Malgun Gothic"/>
                 <a:cs typeface="Malgun Gothic"/>
               </a:rPr>
-              <a:t>© HANWHA SYSTEMS ICT · IT-ACS-003-M · 사내 제한</a:t>
+              <a:t>© 가상 ICT 기업 · IT-ACS-003-M · 사내 제한</a:t>
             </a:r>
           </a:p>
         </p:txBody>
